--- a/cloudflare-deploy/public/library/teacher/teacher-kr.pptx
+++ b/cloudflare-deploy/public/library/teacher/teacher-kr.pptx
@@ -51,6 +51,7 @@
     <p:sldId id="299" r:id="rId50"/>
     <p:sldId id="300" r:id="rId51"/>
     <p:sldId id="301" r:id="rId52"/>
+    <p:sldId id="302" r:id="rId53"/>
   </p:sldIdLst>
   <p:sldSz cx="12191695" cy="6858000" type="screen4x3"/>
   <p:notesSz cx="6858000" cy="9144000"/>
@@ -27849,6 +27850,167 @@
           </a:p>
         </p:txBody>
       </p:sp>
+      <p:sp>
+        <p:nvSpPr>
+          <p:cNvPr id="89" name="Rounded Rectangle 88"/>
+          <p:cNvSpPr/>
+          <p:nvPr/>
+        </p:nvSpPr>
+        <p:spPr>
+          <a:xfrm>
+            <a:off x="6141567" y="4224528"/>
+            <a:ext cx="384048" cy="228600"/>
+          </a:xfrm>
+          <a:prstGeom prst="roundRect">
+            <a:avLst/>
+          </a:prstGeom>
+          <a:solidFill>
+            <a:srgbClr val="EA580C"/>
+          </a:solidFill>
+          <a:ln>
+            <a:noFill/>
+          </a:ln>
+          <a:effectLst/>
+        </p:spPr>
+        <p:style>
+          <a:lnRef idx="1">
+            <a:schemeClr val="accent1"/>
+          </a:lnRef>
+          <a:fillRef idx="3">
+            <a:schemeClr val="accent1"/>
+          </a:fillRef>
+          <a:effectRef idx="2">
+            <a:schemeClr val="accent1"/>
+          </a:effectRef>
+          <a:fontRef idx="minor">
+            <a:schemeClr val="lt1"/>
+          </a:fontRef>
+        </p:style>
+        <p:txBody>
+          <a:bodyPr rtlCol="0" anchor="ctr"/>
+          <a:lstStyle/>
+          <a:p>
+            <a:pPr algn="ctr"/>
+          </a:p>
+        </p:txBody>
+      </p:sp>
+      <p:sp>
+        <p:nvSpPr>
+          <p:cNvPr id="90" name="TextBox 89"/>
+          <p:cNvSpPr txBox="1"/>
+          <p:nvPr/>
+        </p:nvSpPr>
+        <p:spPr>
+          <a:xfrm>
+            <a:off x="6141567" y="4206240"/>
+            <a:ext cx="384048" cy="265176"/>
+          </a:xfrm>
+          <a:prstGeom prst="rect">
+            <a:avLst/>
+          </a:prstGeom>
+          <a:noFill/>
+        </p:spPr>
+        <p:txBody>
+          <a:bodyPr wrap="square" anchor="ctr">
+            <a:spAutoFit/>
+          </a:bodyPr>
+          <a:lstStyle/>
+          <a:p>
+            <a:pPr algn="ctr">
+              <a:lnSpc>
+                <a:spcPct val="100000"/>
+              </a:lnSpc>
+            </a:pPr>
+            <a:r>
+              <a:rPr sz="900" b="1">
+                <a:solidFill>
+                  <a:srgbClr val="FFFFFF"/>
+                </a:solidFill>
+                <a:latin typeface="Malgun Gothic"/>
+              </a:rPr>
+              <a:t>21</a:t>
+            </a:r>
+          </a:p>
+        </p:txBody>
+      </p:sp>
+      <p:sp>
+        <p:nvSpPr>
+          <p:cNvPr id="91" name="TextBox 90"/>
+          <p:cNvSpPr txBox="1"/>
+          <p:nvPr/>
+        </p:nvSpPr>
+        <p:spPr>
+          <a:xfrm>
+            <a:off x="6617055" y="4197096"/>
+            <a:ext cx="4587087" cy="274320"/>
+          </a:xfrm>
+          <a:prstGeom prst="rect">
+            <a:avLst/>
+          </a:prstGeom>
+          <a:noFill/>
+        </p:spPr>
+        <p:txBody>
+          <a:bodyPr wrap="square" anchor="ctr">
+            <a:spAutoFit/>
+          </a:bodyPr>
+          <a:lstStyle/>
+          <a:p>
+            <a:pPr algn="l">
+              <a:lnSpc>
+                <a:spcPct val="100000"/>
+              </a:lnSpc>
+            </a:pPr>
+            <a:r>
+              <a:rPr sz="1050" b="1">
+                <a:solidFill>
+                  <a:srgbClr val="334155"/>
+                </a:solidFill>
+                <a:latin typeface="Malgun Gothic"/>
+              </a:rPr>
+              <a:t>학습 리포트 · 레슨 관리</a:t>
+            </a:r>
+          </a:p>
+        </p:txBody>
+      </p:sp>
+      <p:sp>
+        <p:nvSpPr>
+          <p:cNvPr id="92" name="TextBox 91"/>
+          <p:cNvSpPr txBox="1"/>
+          <p:nvPr/>
+        </p:nvSpPr>
+        <p:spPr>
+          <a:xfrm>
+            <a:off x="11213287" y="4197096"/>
+            <a:ext cx="457200" cy="274320"/>
+          </a:xfrm>
+          <a:prstGeom prst="rect">
+            <a:avLst/>
+          </a:prstGeom>
+          <a:noFill/>
+        </p:spPr>
+        <p:txBody>
+          <a:bodyPr wrap="square" anchor="ctr">
+            <a:spAutoFit/>
+          </a:bodyPr>
+          <a:lstStyle/>
+          <a:p>
+            <a:pPr algn="r">
+              <a:lnSpc>
+                <a:spcPct val="100000"/>
+              </a:lnSpc>
+            </a:pPr>
+            <a:r>
+              <a:rPr sz="1050" b="1">
+                <a:solidFill>
+                  <a:srgbClr val="EA580C"/>
+                </a:solidFill>
+                <a:latin typeface="Malgun Gothic"/>
+              </a:rPr>
+              <a:t>25</a:t>
+            </a:r>
+          </a:p>
+        </p:txBody>
+      </p:sp>
     </p:spTree>
   </p:cSld>
   <p:clrMapOvr>
@@ -38268,7 +38430,7 @@
                 </a:solidFill>
                 <a:latin typeface="Malgun Gothic"/>
               </a:rPr>
-              <a:t>21</a:t>
+              <a:t>22</a:t>
             </a:r>
           </a:p>
         </p:txBody>
@@ -38307,7 +38469,7 @@
                 </a:solidFill>
                 <a:latin typeface="Malgun Gothic"/>
               </a:rPr>
-              <a:t>학습 리포트 · 레슨 관리</a:t>
+              <a:t>수업 연기 처리</a:t>
             </a:r>
           </a:p>
         </p:txBody>
@@ -38346,7 +38508,7 @@
                 </a:solidFill>
                 <a:latin typeface="Malgun Gothic"/>
               </a:rPr>
-              <a:t>25</a:t>
+              <a:t>26</a:t>
             </a:r>
           </a:p>
         </p:txBody>
@@ -38429,7 +38591,7 @@
                 </a:solidFill>
                 <a:latin typeface="Malgun Gothic"/>
               </a:rPr>
-              <a:t>22</a:t>
+              <a:t>23</a:t>
             </a:r>
           </a:p>
         </p:txBody>
@@ -38468,7 +38630,7 @@
                 </a:solidFill>
                 <a:latin typeface="Malgun Gothic"/>
               </a:rPr>
-              <a:t>수업 연기 처리</a:t>
+              <a:t>지원 · 문의</a:t>
             </a:r>
           </a:p>
         </p:txBody>
@@ -38507,7 +38669,7 @@
                 </a:solidFill>
                 <a:latin typeface="Malgun Gothic"/>
               </a:rPr>
-              <a:t>26</a:t>
+              <a:t>27</a:t>
             </a:r>
           </a:p>
         </p:txBody>
@@ -38590,7 +38752,7 @@
                 </a:solidFill>
                 <a:latin typeface="Malgun Gothic"/>
               </a:rPr>
-              <a:t>23</a:t>
+              <a:t>24</a:t>
             </a:r>
           </a:p>
         </p:txBody>
@@ -38629,7 +38791,7 @@
                 </a:solidFill>
                 <a:latin typeface="Malgun Gothic"/>
               </a:rPr>
-              <a:t>지원 · 문의</a:t>
+              <a:t>한국·필리핀 듀얼 시계</a:t>
             </a:r>
           </a:p>
         </p:txBody>
@@ -38668,7 +38830,7 @@
                 </a:solidFill>
                 <a:latin typeface="Malgun Gothic"/>
               </a:rPr>
-              <a:t>27</a:t>
+              <a:t>28</a:t>
             </a:r>
           </a:p>
         </p:txBody>
@@ -38751,7 +38913,7 @@
                 </a:solidFill>
                 <a:latin typeface="Malgun Gothic"/>
               </a:rPr>
-              <a:t>24</a:t>
+              <a:t>25</a:t>
             </a:r>
           </a:p>
         </p:txBody>
@@ -38790,7 +38952,7 @@
                 </a:solidFill>
                 <a:latin typeface="Malgun Gothic"/>
               </a:rPr>
-              <a:t>한국·필리핀 듀얼 시계</a:t>
+              <a:t>중국어 발음 코치</a:t>
             </a:r>
           </a:p>
         </p:txBody>
@@ -38829,7 +38991,7 @@
                 </a:solidFill>
                 <a:latin typeface="Malgun Gothic"/>
               </a:rPr>
-              <a:t>28</a:t>
+              <a:t>29</a:t>
             </a:r>
           </a:p>
         </p:txBody>
@@ -38912,7 +39074,7 @@
                 </a:solidFill>
                 <a:latin typeface="Malgun Gothic"/>
               </a:rPr>
-              <a:t>25</a:t>
+              <a:t>26</a:t>
             </a:r>
           </a:p>
         </p:txBody>
@@ -38951,7 +39113,7 @@
                 </a:solidFill>
                 <a:latin typeface="Malgun Gothic"/>
               </a:rPr>
-              <a:t>중국어 발음 코치</a:t>
+              <a:t>수업 종료 후 AI 코칭</a:t>
             </a:r>
           </a:p>
         </p:txBody>
@@ -38990,7 +39152,7 @@
                 </a:solidFill>
                 <a:latin typeface="Malgun Gothic"/>
               </a:rPr>
-              <a:t>29</a:t>
+              <a:t>30</a:t>
             </a:r>
           </a:p>
         </p:txBody>
@@ -39073,7 +39235,7 @@
                 </a:solidFill>
                 <a:latin typeface="Malgun Gothic"/>
               </a:rPr>
-              <a:t>26</a:t>
+              <a:t>27</a:t>
             </a:r>
           </a:p>
         </p:txBody>
@@ -39112,7 +39274,7 @@
                 </a:solidFill>
                 <a:latin typeface="Malgun Gothic"/>
               </a:rPr>
-              <a:t>수업 종료 후 AI 코칭</a:t>
+              <a:t>탭 동기화 (내 화면 그대로 학생에게)</a:t>
             </a:r>
           </a:p>
         </p:txBody>
@@ -39151,7 +39313,7 @@
                 </a:solidFill>
                 <a:latin typeface="Malgun Gothic"/>
               </a:rPr>
-              <a:t>30</a:t>
+              <a:t>31</a:t>
             </a:r>
           </a:p>
         </p:txBody>
@@ -39234,7 +39396,7 @@
                 </a:solidFill>
                 <a:latin typeface="Malgun Gothic"/>
               </a:rPr>
-              <a:t>27</a:t>
+              <a:t>28</a:t>
             </a:r>
           </a:p>
         </p:txBody>
@@ -39273,7 +39435,7 @@
                 </a:solidFill>
                 <a:latin typeface="Malgun Gothic"/>
               </a:rPr>
-              <a:t>탭 동기화 (내 화면 그대로 학생에게)</a:t>
+              <a:t>1:1 개별 채팅 &amp; 파일 보내기</a:t>
             </a:r>
           </a:p>
         </p:txBody>
@@ -39312,7 +39474,7 @@
                 </a:solidFill>
                 <a:latin typeface="Malgun Gothic"/>
               </a:rPr>
-              <a:t>31</a:t>
+              <a:t>32</a:t>
             </a:r>
           </a:p>
         </p:txBody>
@@ -39395,7 +39557,7 @@
                 </a:solidFill>
                 <a:latin typeface="Malgun Gothic"/>
               </a:rPr>
-              <a:t>28</a:t>
+              <a:t>29</a:t>
             </a:r>
           </a:p>
         </p:txBody>
@@ -39434,7 +39596,7 @@
                 </a:solidFill>
                 <a:latin typeface="Malgun Gothic"/>
               </a:rPr>
-              <a:t>1:1 개별 채팅 &amp; 파일 보내기</a:t>
+              <a:t>수업 연기·변경 요청하기</a:t>
             </a:r>
           </a:p>
         </p:txBody>
@@ -39473,7 +39635,7 @@
                 </a:solidFill>
                 <a:latin typeface="Malgun Gothic"/>
               </a:rPr>
-              <a:t>32</a:t>
+              <a:t>33</a:t>
             </a:r>
           </a:p>
         </p:txBody>
@@ -39556,7 +39718,7 @@
                 </a:solidFill>
                 <a:latin typeface="Malgun Gothic"/>
               </a:rPr>
-              <a:t>29</a:t>
+              <a:t>30</a:t>
             </a:r>
           </a:p>
         </p:txBody>
@@ -39595,7 +39757,7 @@
                 </a:solidFill>
                 <a:latin typeface="Malgun Gothic"/>
               </a:rPr>
-              <a:t>수업 연기·변경 요청하기</a:t>
+              <a:t>내 수업료 정산 확인</a:t>
             </a:r>
           </a:p>
         </p:txBody>
@@ -39634,7 +39796,7 @@
                 </a:solidFill>
                 <a:latin typeface="Malgun Gothic"/>
               </a:rPr>
-              <a:t>33</a:t>
+              <a:t>34</a:t>
             </a:r>
           </a:p>
         </p:txBody>
@@ -39717,7 +39879,7 @@
                 </a:solidFill>
                 <a:latin typeface="Malgun Gothic"/>
               </a:rPr>
-              <a:t>30</a:t>
+              <a:t>31</a:t>
             </a:r>
           </a:p>
         </p:txBody>
@@ -39756,7 +39918,7 @@
                 </a:solidFill>
                 <a:latin typeface="Malgun Gothic"/>
               </a:rPr>
-              <a:t>내 수업료 정산 확인</a:t>
+              <a:t>수업 통제 3종 (집중 · 배경 잠금 · 이탈 방지)</a:t>
             </a:r>
           </a:p>
         </p:txBody>
@@ -39795,7 +39957,7 @@
                 </a:solidFill>
                 <a:latin typeface="Malgun Gothic"/>
               </a:rPr>
-              <a:t>34</a:t>
+              <a:t>35</a:t>
             </a:r>
           </a:p>
         </p:txBody>
@@ -39878,7 +40040,7 @@
                 </a:solidFill>
                 <a:latin typeface="Malgun Gothic"/>
               </a:rPr>
-              <a:t>31</a:t>
+              <a:t>32</a:t>
             </a:r>
           </a:p>
         </p:txBody>
@@ -39917,7 +40079,7 @@
                 </a:solidFill>
                 <a:latin typeface="Malgun Gothic"/>
               </a:rPr>
-              <a:t>수업 통제 3종 (집중 · 배경 잠금 · 이탈 방지)</a:t>
+              <a:t>교재 PDF — 필기 이어가기 · 빠른 페이지 이동</a:t>
             </a:r>
           </a:p>
         </p:txBody>
@@ -39956,7 +40118,7 @@
                 </a:solidFill>
                 <a:latin typeface="Malgun Gothic"/>
               </a:rPr>
-              <a:t>35</a:t>
+              <a:t>36</a:t>
             </a:r>
           </a:p>
         </p:txBody>
@@ -40039,7 +40201,7 @@
                 </a:solidFill>
                 <a:latin typeface="Malgun Gothic"/>
               </a:rPr>
-              <a:t>32</a:t>
+              <a:t>33</a:t>
             </a:r>
           </a:p>
         </p:txBody>
@@ -40078,7 +40240,7 @@
                 </a:solidFill>
                 <a:latin typeface="Malgun Gothic"/>
               </a:rPr>
-              <a:t>교재 PDF — 필기 이어가기 · 빠른 페이지 이동</a:t>
+              <a:t>인터넷이 느릴 때 자동으로 버텨요</a:t>
             </a:r>
           </a:p>
         </p:txBody>
@@ -40117,7 +40279,7 @@
                 </a:solidFill>
                 <a:latin typeface="Malgun Gothic"/>
               </a:rPr>
-              <a:t>36</a:t>
+              <a:t>37</a:t>
             </a:r>
           </a:p>
         </p:txBody>
@@ -40200,7 +40362,7 @@
                 </a:solidFill>
                 <a:latin typeface="Malgun Gothic"/>
               </a:rPr>
-              <a:t>33</a:t>
+              <a:t>34</a:t>
             </a:r>
           </a:p>
         </p:txBody>
@@ -40239,7 +40401,7 @@
                 </a:solidFill>
                 <a:latin typeface="Malgun Gothic"/>
               </a:rPr>
-              <a:t>인터넷이 느릴 때 자동으로 버텨요</a:t>
+              <a:t>판단력 훈련 함께하기 (수업 중)</a:t>
             </a:r>
           </a:p>
         </p:txBody>
@@ -40278,7 +40440,7 @@
                 </a:solidFill>
                 <a:latin typeface="Malgun Gothic"/>
               </a:rPr>
-              <a:t>37</a:t>
+              <a:t>38</a:t>
             </a:r>
           </a:p>
         </p:txBody>
@@ -40361,7 +40523,7 @@
                 </a:solidFill>
                 <a:latin typeface="Malgun Gothic"/>
               </a:rPr>
-              <a:t>34</a:t>
+              <a:t>35</a:t>
             </a:r>
           </a:p>
         </p:txBody>
@@ -40400,7 +40562,7 @@
                 </a:solidFill>
                 <a:latin typeface="Malgun Gothic"/>
               </a:rPr>
-              <a:t>판단력 훈련 함께하기 (수업 중)</a:t>
+              <a:t>지난 수업 녹화 다시보기</a:t>
             </a:r>
           </a:p>
         </p:txBody>
@@ -40439,7 +40601,7 @@
                 </a:solidFill>
                 <a:latin typeface="Malgun Gothic"/>
               </a:rPr>
-              <a:t>38</a:t>
+              <a:t>39</a:t>
             </a:r>
           </a:p>
         </p:txBody>
@@ -40522,7 +40684,7 @@
                 </a:solidFill>
                 <a:latin typeface="Malgun Gothic"/>
               </a:rPr>
-              <a:t>35</a:t>
+              <a:t>36</a:t>
             </a:r>
           </a:p>
         </p:txBody>
@@ -40561,7 +40723,7 @@
                 </a:solidFill>
                 <a:latin typeface="Malgun Gothic"/>
               </a:rPr>
-              <a:t>지난 수업 녹화 다시보기</a:t>
+              <a:t>내 계정 관리 (비밀번호 · 화면 언어)</a:t>
             </a:r>
           </a:p>
         </p:txBody>
@@ -40600,7 +40762,7 @@
                 </a:solidFill>
                 <a:latin typeface="Malgun Gothic"/>
               </a:rPr>
-              <a:t>39</a:t>
+              <a:t>40</a:t>
             </a:r>
           </a:p>
         </p:txBody>
@@ -40683,7 +40845,7 @@
                 </a:solidFill>
                 <a:latin typeface="Malgun Gothic"/>
               </a:rPr>
-              <a:t>36</a:t>
+              <a:t>37</a:t>
             </a:r>
           </a:p>
         </p:txBody>
@@ -40722,7 +40884,7 @@
                 </a:solidFill>
                 <a:latin typeface="Malgun Gothic"/>
               </a:rPr>
-              <a:t>내 계정 관리 (비밀번호 · 화면 언어)</a:t>
+              <a:t>학부모 월간 성적표 (내 평가가 반영돼요)</a:t>
             </a:r>
           </a:p>
         </p:txBody>
@@ -40761,7 +40923,7 @@
                 </a:solidFill>
                 <a:latin typeface="Malgun Gothic"/>
               </a:rPr>
-              <a:t>40</a:t>
+              <a:t>41</a:t>
             </a:r>
           </a:p>
         </p:txBody>
@@ -40844,7 +41006,7 @@
                 </a:solidFill>
                 <a:latin typeface="Malgun Gothic"/>
               </a:rPr>
-              <a:t>37</a:t>
+              <a:t>38</a:t>
             </a:r>
           </a:p>
         </p:txBody>
@@ -40922,7 +41084,7 @@
                 </a:solidFill>
                 <a:latin typeface="Malgun Gothic"/>
               </a:rPr>
-              <a:t>41</a:t>
+              <a:t>42</a:t>
             </a:r>
           </a:p>
         </p:txBody>
@@ -41005,7 +41167,7 @@
                 </a:solidFill>
                 <a:latin typeface="Malgun Gothic"/>
               </a:rPr>
-              <a:t>38</a:t>
+              <a:t>39</a:t>
             </a:r>
           </a:p>
         </p:txBody>
@@ -41083,7 +41245,7 @@
                 </a:solidFill>
                 <a:latin typeface="Malgun Gothic"/>
               </a:rPr>
-              <a:t>42</a:t>
+              <a:t>43</a:t>
             </a:r>
           </a:p>
         </p:txBody>
@@ -41166,7 +41328,7 @@
                 </a:solidFill>
                 <a:latin typeface="Malgun Gothic"/>
               </a:rPr>
-              <a:t>39</a:t>
+              <a:t>40</a:t>
             </a:r>
           </a:p>
         </p:txBody>
@@ -41244,7 +41406,7 @@
                 </a:solidFill>
                 <a:latin typeface="Malgun Gothic"/>
               </a:rPr>
-              <a:t>43</a:t>
+              <a:t>44</a:t>
             </a:r>
           </a:p>
         </p:txBody>
@@ -41327,7 +41489,7 @@
                 </a:solidFill>
                 <a:latin typeface="Malgun Gothic"/>
               </a:rPr>
-              <a:t>40</a:t>
+              <a:t>41</a:t>
             </a:r>
           </a:p>
         </p:txBody>
@@ -41405,7 +41567,7 @@
                 </a:solidFill>
                 <a:latin typeface="Malgun Gothic"/>
               </a:rPr>
-              <a:t>44</a:t>
+              <a:t>45</a:t>
             </a:r>
           </a:p>
         </p:txBody>
@@ -41488,7 +41650,7 @@
                 </a:solidFill>
                 <a:latin typeface="Malgun Gothic"/>
               </a:rPr>
-              <a:t>41</a:t>
+              <a:t>42</a:t>
             </a:r>
           </a:p>
         </p:txBody>
@@ -41566,7 +41728,7 @@
                 </a:solidFill>
                 <a:latin typeface="Malgun Gothic"/>
               </a:rPr>
-              <a:t>45</a:t>
+              <a:t>46</a:t>
             </a:r>
           </a:p>
         </p:txBody>
@@ -42715,7 +42877,7 @@
                 </a:solidFill>
                 <a:latin typeface="Malgun Gothic"/>
               </a:rPr>
-              <a:t>기능 요약 · 데이터</a:t>
+              <a:t>주요 기능 사용법</a:t>
             </a:r>
           </a:p>
         </p:txBody>
@@ -42728,8 +42890,8 @@
         </p:nvSpPr>
         <p:spPr>
           <a:xfrm>
-            <a:off x="365760" y="841248"/>
-            <a:ext cx="658368" cy="512064"/>
+            <a:off x="365760" y="822960"/>
+            <a:ext cx="868680" cy="868680"/>
           </a:xfrm>
           <a:prstGeom prst="roundRect">
             <a:avLst/>
@@ -42772,9 +42934,938 @@
         </p:nvSpPr>
         <p:spPr>
           <a:xfrm>
+            <a:off x="365760" y="822960"/>
+            <a:ext cx="868680" cy="868680"/>
+          </a:xfrm>
+          <a:prstGeom prst="rect">
+            <a:avLst/>
+          </a:prstGeom>
+          <a:noFill/>
+        </p:spPr>
+        <p:txBody>
+          <a:bodyPr wrap="square" anchor="ctr">
+            <a:spAutoFit/>
+          </a:bodyPr>
+          <a:lstStyle/>
+          <a:p>
+            <a:pPr algn="ctr">
+              <a:lnSpc>
+                <a:spcPct val="100000"/>
+              </a:lnSpc>
+            </a:pPr>
+            <a:r>
+              <a:rPr sz="2600" b="1">
+                <a:solidFill>
+                  <a:srgbClr val="FFFFFF"/>
+                </a:solidFill>
+                <a:latin typeface="Malgun Gothic"/>
+              </a:rPr>
+              <a:t>37</a:t>
+            </a:r>
+          </a:p>
+        </p:txBody>
+      </p:sp>
+      <p:sp>
+        <p:nvSpPr>
+          <p:cNvPr id="8" name="TextBox 7"/>
+          <p:cNvSpPr txBox="1"/>
+          <p:nvPr/>
+        </p:nvSpPr>
+        <p:spPr>
+          <a:xfrm>
+            <a:off x="1371600" y="822960"/>
+            <a:ext cx="10424160" cy="502920"/>
+          </a:xfrm>
+          <a:prstGeom prst="rect">
+            <a:avLst/>
+          </a:prstGeom>
+          <a:noFill/>
+        </p:spPr>
+        <p:txBody>
+          <a:bodyPr wrap="square" anchor="t">
+            <a:spAutoFit/>
+          </a:bodyPr>
+          <a:lstStyle/>
+          <a:p>
+            <a:pPr algn="l">
+              <a:lnSpc>
+                <a:spcPct val="100000"/>
+              </a:lnSpc>
+            </a:pPr>
+            <a:r>
+              <a:rPr sz="2300" b="1">
+                <a:solidFill>
+                  <a:srgbClr val="1E2340"/>
+                </a:solidFill>
+                <a:latin typeface="Malgun Gothic"/>
+              </a:rPr>
+              <a:t>🌟 학부모 월간 성적표 (내 평가가 반영돼요)</a:t>
+            </a:r>
+          </a:p>
+        </p:txBody>
+      </p:sp>
+      <p:sp>
+        <p:nvSpPr>
+          <p:cNvPr id="9" name="TextBox 8"/>
+          <p:cNvSpPr txBox="1"/>
+          <p:nvPr/>
+        </p:nvSpPr>
+        <p:spPr>
+          <a:xfrm>
+            <a:off x="1417320" y="1353312"/>
+            <a:ext cx="10424160" cy="320040"/>
+          </a:xfrm>
+          <a:prstGeom prst="rect">
+            <a:avLst/>
+          </a:prstGeom>
+          <a:noFill/>
+        </p:spPr>
+        <p:txBody>
+          <a:bodyPr wrap="square" anchor="t">
+            <a:spAutoFit/>
+          </a:bodyPr>
+          <a:lstStyle/>
+          <a:p>
+            <a:pPr algn="l">
+              <a:lnSpc>
+                <a:spcPct val="100000"/>
+              </a:lnSpc>
+            </a:pPr>
+            <a:r>
+              <a:rPr sz="1300" b="0">
+                <a:solidFill>
+                  <a:srgbClr val="64748B"/>
+                </a:solidFill>
+                <a:latin typeface="Malgun Gothic"/>
+              </a:rPr>
+              <a:t>오각형 5축은 내가 남긴 평가로 채워져요</a:t>
+            </a:r>
+          </a:p>
+        </p:txBody>
+      </p:sp>
+      <p:sp>
+        <p:nvSpPr>
+          <p:cNvPr id="10" name="Rounded Rectangle 9"/>
+          <p:cNvSpPr/>
+          <p:nvPr/>
+        </p:nvSpPr>
+        <p:spPr>
+          <a:xfrm>
+            <a:off x="365760" y="1828800"/>
+            <a:ext cx="11430000" cy="777240"/>
+          </a:xfrm>
+          <a:prstGeom prst="roundRect">
+            <a:avLst/>
+          </a:prstGeom>
+          <a:solidFill>
+            <a:srgbClr val="FFF4E6"/>
+          </a:solidFill>
+          <a:ln>
+            <a:noFill/>
+          </a:ln>
+          <a:effectLst/>
+        </p:spPr>
+        <p:style>
+          <a:lnRef idx="1">
+            <a:schemeClr val="accent1"/>
+          </a:lnRef>
+          <a:fillRef idx="3">
+            <a:schemeClr val="accent1"/>
+          </a:fillRef>
+          <a:effectRef idx="2">
+            <a:schemeClr val="accent1"/>
+          </a:effectRef>
+          <a:fontRef idx="minor">
+            <a:schemeClr val="lt1"/>
+          </a:fontRef>
+        </p:style>
+        <p:txBody>
+          <a:bodyPr rtlCol="0" anchor="ctr"/>
+          <a:lstStyle/>
+          <a:p>
+            <a:pPr algn="ctr"/>
+          </a:p>
+        </p:txBody>
+      </p:sp>
+      <p:sp>
+        <p:nvSpPr>
+          <p:cNvPr id="11" name="TextBox 10"/>
+          <p:cNvSpPr txBox="1"/>
+          <p:nvPr/>
+        </p:nvSpPr>
+        <p:spPr>
+          <a:xfrm>
+            <a:off x="548640" y="1901952"/>
+            <a:ext cx="11064240" cy="640080"/>
+          </a:xfrm>
+          <a:prstGeom prst="rect">
+            <a:avLst/>
+          </a:prstGeom>
+          <a:noFill/>
+        </p:spPr>
+        <p:txBody>
+          <a:bodyPr wrap="square" anchor="t">
+            <a:spAutoFit/>
+          </a:bodyPr>
+          <a:lstStyle/>
+          <a:p>
+            <a:pPr algn="l">
+              <a:lnSpc>
+                <a:spcPct val="115000"/>
+              </a:lnSpc>
+            </a:pPr>
+            <a:r>
+              <a:rPr sz="1200" b="0">
+                <a:solidFill>
+                  <a:srgbClr val="334155"/>
+                </a:solidFill>
+                <a:latin typeface="Malgun Gothic"/>
+              </a:rPr>
+              <a:t>학부모에게 나가는 오각형 월간 성적표의 다섯 축(발음·유창성 / 어휘 / 문장 구성력 / 수업 태도 / 참여도)은 선생님이 남긴 수업 평가와 발음 기록으로 채워집니다. 평가를 꾸준히 남길수록 성적표가 정확하고 풍성해져요. 담임의 한마디는 AI 초안을 확인·수정해 내보냅니다.</a:t>
+            </a:r>
+          </a:p>
+        </p:txBody>
+      </p:sp>
+      <p:sp>
+        <p:nvSpPr>
+          <p:cNvPr id="12" name="TextBox 11"/>
+          <p:cNvSpPr txBox="1"/>
+          <p:nvPr/>
+        </p:nvSpPr>
+        <p:spPr>
+          <a:xfrm>
+            <a:off x="457200" y="2743200"/>
+            <a:ext cx="5669280" cy="320040"/>
+          </a:xfrm>
+          <a:prstGeom prst="rect">
+            <a:avLst/>
+          </a:prstGeom>
+          <a:noFill/>
+        </p:spPr>
+        <p:txBody>
+          <a:bodyPr wrap="square" anchor="t">
+            <a:spAutoFit/>
+          </a:bodyPr>
+          <a:lstStyle/>
+          <a:p>
+            <a:pPr algn="l">
+              <a:lnSpc>
+                <a:spcPct val="100000"/>
+              </a:lnSpc>
+            </a:pPr>
+            <a:r>
+              <a:rPr sz="1350" b="1">
+                <a:solidFill>
+                  <a:srgbClr val="EA580C"/>
+                </a:solidFill>
+                <a:latin typeface="Malgun Gothic"/>
+              </a:rPr>
+              <a:t>사용 방법</a:t>
+            </a:r>
+          </a:p>
+        </p:txBody>
+      </p:sp>
+      <p:sp>
+        <p:nvSpPr>
+          <p:cNvPr id="13" name="TextBox 12"/>
+          <p:cNvSpPr txBox="1"/>
+          <p:nvPr/>
+        </p:nvSpPr>
+        <p:spPr>
+          <a:xfrm>
+            <a:off x="457200" y="3108960"/>
+            <a:ext cx="5669280" cy="2377440"/>
+          </a:xfrm>
+          <a:prstGeom prst="rect">
+            <a:avLst/>
+          </a:prstGeom>
+          <a:noFill/>
+        </p:spPr>
+        <p:txBody>
+          <a:bodyPr wrap="square">
+            <a:spAutoFit/>
+          </a:bodyPr>
+          <a:lstStyle/>
+          <a:p>
+            <a:pPr>
+              <a:lnSpc>
+                <a:spcPct val="115000"/>
+              </a:lnSpc>
+              <a:spcAft>
+                <a:spcPts val="600"/>
+              </a:spcAft>
+            </a:pPr>
+            <a:r>
+              <a:rPr sz="1050" b="1">
+                <a:solidFill>
+                  <a:srgbClr val="EA580C"/>
+                </a:solidFill>
+                <a:latin typeface="Malgun Gothic"/>
+              </a:rPr>
+              <a:t>● </a:t>
+            </a:r>
+            <a:r>
+              <a:rPr sz="1250">
+                <a:solidFill>
+                  <a:srgbClr val="334155"/>
+                </a:solidFill>
+                <a:latin typeface="Malgun Gothic"/>
+              </a:rPr>
+              <a:t>평소처럼 수업 평가서를 성실히 작성해요.</a:t>
+            </a:r>
+          </a:p>
+          <a:p>
+            <a:pPr>
+              <a:lnSpc>
+                <a:spcPct val="115000"/>
+              </a:lnSpc>
+              <a:spcAft>
+                <a:spcPts val="600"/>
+              </a:spcAft>
+            </a:pPr>
+            <a:r>
+              <a:rPr sz="1050" b="1">
+                <a:solidFill>
+                  <a:srgbClr val="EA580C"/>
+                </a:solidFill>
+                <a:latin typeface="Malgun Gothic"/>
+              </a:rPr>
+              <a:t>● </a:t>
+            </a:r>
+            <a:r>
+              <a:rPr sz="1250">
+                <a:solidFill>
+                  <a:srgbClr val="334155"/>
+                </a:solidFill>
+                <a:latin typeface="Malgun Gothic"/>
+              </a:rPr>
+              <a:t>발음 연습·판단력 훈련 기록이 자동으로 축에 반영돼요.</a:t>
+            </a:r>
+          </a:p>
+          <a:p>
+            <a:pPr>
+              <a:lnSpc>
+                <a:spcPct val="115000"/>
+              </a:lnSpc>
+              <a:spcAft>
+                <a:spcPts val="600"/>
+              </a:spcAft>
+            </a:pPr>
+            <a:r>
+              <a:rPr sz="1050" b="1">
+                <a:solidFill>
+                  <a:srgbClr val="EA580C"/>
+                </a:solidFill>
+                <a:latin typeface="Malgun Gothic"/>
+              </a:rPr>
+              <a:t>● </a:t>
+            </a:r>
+            <a:r>
+              <a:rPr sz="1250">
+                <a:solidFill>
+                  <a:srgbClr val="334155"/>
+                </a:solidFill>
+                <a:latin typeface="Malgun Gothic"/>
+              </a:rPr>
+              <a:t>성적표의 담임의 한마디 AI 초안을 확인하고 다듬어요.</a:t>
+            </a:r>
+          </a:p>
+          <a:p>
+            <a:pPr>
+              <a:lnSpc>
+                <a:spcPct val="115000"/>
+              </a:lnSpc>
+              <a:spcAft>
+                <a:spcPts val="600"/>
+              </a:spcAft>
+            </a:pPr>
+            <a:r>
+              <a:rPr sz="1050" b="1">
+                <a:solidFill>
+                  <a:srgbClr val="EA580C"/>
+                </a:solidFill>
+                <a:latin typeface="Malgun Gothic"/>
+              </a:rPr>
+              <a:t>● </a:t>
+            </a:r>
+            <a:r>
+              <a:rPr sz="1250">
+                <a:solidFill>
+                  <a:srgbClr val="334155"/>
+                </a:solidFill>
+                <a:latin typeface="Malgun Gothic"/>
+              </a:rPr>
+              <a:t>미리보기로 오각형이 잘 채워졌는지 확인해요.</a:t>
+            </a:r>
+          </a:p>
+        </p:txBody>
+      </p:sp>
+      <p:sp>
+        <p:nvSpPr>
+          <p:cNvPr id="14" name="Rounded Rectangle 13"/>
+          <p:cNvSpPr/>
+          <p:nvPr/>
+        </p:nvSpPr>
+        <p:spPr>
+          <a:xfrm>
+            <a:off x="457200" y="4782312"/>
+            <a:ext cx="5669280" cy="1005840"/>
+          </a:xfrm>
+          <a:prstGeom prst="roundRect">
+            <a:avLst/>
+          </a:prstGeom>
+          <a:solidFill>
+            <a:srgbClr val="F4F7FF"/>
+          </a:solidFill>
+          <a:ln w="12700">
+            <a:solidFill>
+              <a:srgbClr val="EA580C"/>
+            </a:solidFill>
+          </a:ln>
+          <a:effectLst/>
+        </p:spPr>
+        <p:style>
+          <a:lnRef idx="1">
+            <a:schemeClr val="accent1"/>
+          </a:lnRef>
+          <a:fillRef idx="3">
+            <a:schemeClr val="accent1"/>
+          </a:fillRef>
+          <a:effectRef idx="2">
+            <a:schemeClr val="accent1"/>
+          </a:effectRef>
+          <a:fontRef idx="minor">
+            <a:schemeClr val="lt1"/>
+          </a:fontRef>
+        </p:style>
+        <p:txBody>
+          <a:bodyPr rtlCol="0" anchor="ctr"/>
+          <a:lstStyle/>
+          <a:p>
+            <a:pPr algn="ctr"/>
+          </a:p>
+        </p:txBody>
+      </p:sp>
+      <p:sp>
+        <p:nvSpPr>
+          <p:cNvPr id="15" name="TextBox 14"/>
+          <p:cNvSpPr txBox="1"/>
+          <p:nvPr/>
+        </p:nvSpPr>
+        <p:spPr>
+          <a:xfrm>
+            <a:off x="594360" y="4837175"/>
+            <a:ext cx="5394960" cy="274320"/>
+          </a:xfrm>
+          <a:prstGeom prst="rect">
+            <a:avLst/>
+          </a:prstGeom>
+          <a:noFill/>
+        </p:spPr>
+        <p:txBody>
+          <a:bodyPr wrap="square" anchor="t">
+            <a:spAutoFit/>
+          </a:bodyPr>
+          <a:lstStyle/>
+          <a:p>
+            <a:pPr algn="l">
+              <a:lnSpc>
+                <a:spcPct val="100000"/>
+              </a:lnSpc>
+            </a:pPr>
+            <a:r>
+              <a:rPr sz="1150" b="1">
+                <a:solidFill>
+                  <a:srgbClr val="EA580C"/>
+                </a:solidFill>
+                <a:latin typeface="Malgun Gothic"/>
+              </a:rPr>
+              <a:t>✅ 핵심 포인트</a:t>
+            </a:r>
+          </a:p>
+        </p:txBody>
+      </p:sp>
+      <p:sp>
+        <p:nvSpPr>
+          <p:cNvPr id="16" name="TextBox 15"/>
+          <p:cNvSpPr txBox="1"/>
+          <p:nvPr/>
+        </p:nvSpPr>
+        <p:spPr>
+          <a:xfrm>
+            <a:off x="594360" y="5111496"/>
+            <a:ext cx="5394960" cy="640080"/>
+          </a:xfrm>
+          <a:prstGeom prst="rect">
+            <a:avLst/>
+          </a:prstGeom>
+          <a:noFill/>
+        </p:spPr>
+        <p:txBody>
+          <a:bodyPr wrap="square">
+            <a:spAutoFit/>
+          </a:bodyPr>
+          <a:lstStyle/>
+          <a:p>
+            <a:pPr>
+              <a:lnSpc>
+                <a:spcPct val="115000"/>
+              </a:lnSpc>
+              <a:spcAft>
+                <a:spcPts val="200"/>
+              </a:spcAft>
+            </a:pPr>
+            <a:r>
+              <a:rPr sz="900" b="1">
+                <a:solidFill>
+                  <a:srgbClr val="EA580C"/>
+                </a:solidFill>
+                <a:latin typeface="Malgun Gothic"/>
+              </a:rPr>
+              <a:t>● </a:t>
+            </a:r>
+            <a:r>
+              <a:rPr sz="1100">
+                <a:solidFill>
+                  <a:srgbClr val="334155"/>
+                </a:solidFill>
+                <a:latin typeface="Malgun Gothic"/>
+              </a:rPr>
+              <a:t>값이 있는 축만 채워져요 — 평가가 없으면 그 축은 비어 보여요.</a:t>
+            </a:r>
+          </a:p>
+          <a:p>
+            <a:pPr>
+              <a:lnSpc>
+                <a:spcPct val="115000"/>
+              </a:lnSpc>
+              <a:spcAft>
+                <a:spcPts val="200"/>
+              </a:spcAft>
+            </a:pPr>
+            <a:r>
+              <a:rPr sz="900" b="1">
+                <a:solidFill>
+                  <a:srgbClr val="EA580C"/>
+                </a:solidFill>
+                <a:latin typeface="Malgun Gothic"/>
+              </a:rPr>
+              <a:t>● </a:t>
+            </a:r>
+            <a:r>
+              <a:rPr sz="1100">
+                <a:solidFill>
+                  <a:srgbClr val="334155"/>
+                </a:solidFill>
+                <a:latin typeface="Malgun Gothic"/>
+              </a:rPr>
+              <a:t>긴 코멘트보다 꾸준한 평가가 성적표 품질을 좌우해요.</a:t>
+            </a:r>
+          </a:p>
+        </p:txBody>
+      </p:sp>
+      <p:sp>
+        <p:nvSpPr>
+          <p:cNvPr id="17" name="Rounded Rectangle 16"/>
+          <p:cNvSpPr/>
+          <p:nvPr/>
+        </p:nvSpPr>
+        <p:spPr>
+          <a:xfrm>
+            <a:off x="457200" y="5897879"/>
+            <a:ext cx="5669280" cy="658368"/>
+          </a:xfrm>
+          <a:prstGeom prst="roundRect">
+            <a:avLst/>
+          </a:prstGeom>
+          <a:solidFill>
+            <a:srgbClr val="FFF7E6"/>
+          </a:solidFill>
+          <a:ln w="12700">
+            <a:solidFill>
+              <a:srgbClr val="FFB020"/>
+            </a:solidFill>
+          </a:ln>
+          <a:effectLst/>
+        </p:spPr>
+        <p:style>
+          <a:lnRef idx="1">
+            <a:schemeClr val="accent1"/>
+          </a:lnRef>
+          <a:fillRef idx="3">
+            <a:schemeClr val="accent1"/>
+          </a:fillRef>
+          <a:effectRef idx="2">
+            <a:schemeClr val="accent1"/>
+          </a:effectRef>
+          <a:fontRef idx="minor">
+            <a:schemeClr val="lt1"/>
+          </a:fontRef>
+        </p:style>
+        <p:txBody>
+          <a:bodyPr rtlCol="0" anchor="ctr"/>
+          <a:lstStyle/>
+          <a:p>
+            <a:pPr algn="ctr"/>
+          </a:p>
+        </p:txBody>
+      </p:sp>
+      <p:sp>
+        <p:nvSpPr>
+          <p:cNvPr id="18" name="TextBox 17"/>
+          <p:cNvSpPr txBox="1"/>
+          <p:nvPr/>
+        </p:nvSpPr>
+        <p:spPr>
+          <a:xfrm>
+            <a:off x="594360" y="5943599"/>
+            <a:ext cx="5394960" cy="566928"/>
+          </a:xfrm>
+          <a:prstGeom prst="rect">
+            <a:avLst/>
+          </a:prstGeom>
+          <a:noFill/>
+        </p:spPr>
+        <p:txBody>
+          <a:bodyPr wrap="square" anchor="t">
+            <a:spAutoFit/>
+          </a:bodyPr>
+          <a:lstStyle/>
+          <a:p>
+            <a:pPr algn="l">
+              <a:lnSpc>
+                <a:spcPct val="105000"/>
+              </a:lnSpc>
+            </a:pPr>
+            <a:r>
+              <a:rPr sz="1050" b="0">
+                <a:solidFill>
+                  <a:srgbClr val="5B4A2A"/>
+                </a:solidFill>
+                <a:latin typeface="Malgun Gothic"/>
+              </a:rPr>
+              <a:t>💡 꿀팁 · 매 수업 한 줄이라도 평가를 남기면 월말 성적표가 저절로 완성됩니다.</a:t>
+            </a:r>
+          </a:p>
+        </p:txBody>
+      </p:sp>
+      <p:sp>
+        <p:nvSpPr>
+          <p:cNvPr id="19" name="Rectangle 18"/>
+          <p:cNvSpPr/>
+          <p:nvPr/>
+        </p:nvSpPr>
+        <p:spPr>
+          <a:xfrm>
+            <a:off x="6300216" y="2345436"/>
+            <a:ext cx="5596128" cy="3538728"/>
+          </a:xfrm>
+          <a:prstGeom prst="rect">
+            <a:avLst/>
+          </a:prstGeom>
+          <a:solidFill>
+            <a:srgbClr val="FFFFFF"/>
+          </a:solidFill>
+          <a:ln w="12700">
+            <a:solidFill>
+              <a:srgbClr val="E2E8F0"/>
+            </a:solidFill>
+          </a:ln>
+          <a:effectLst/>
+        </p:spPr>
+        <p:style>
+          <a:lnRef idx="1">
+            <a:schemeClr val="accent1"/>
+          </a:lnRef>
+          <a:fillRef idx="3">
+            <a:schemeClr val="accent1"/>
+          </a:fillRef>
+          <a:effectRef idx="2">
+            <a:schemeClr val="accent1"/>
+          </a:effectRef>
+          <a:fontRef idx="minor">
+            <a:schemeClr val="lt1"/>
+          </a:fontRef>
+        </p:style>
+        <p:txBody>
+          <a:bodyPr rtlCol="0" anchor="ctr"/>
+          <a:lstStyle/>
+          <a:p>
+            <a:pPr algn="ctr"/>
+          </a:p>
+        </p:txBody>
+      </p:sp>
+      <p:pic>
+        <p:nvPicPr>
+          <p:cNvPr id="20" name="Picture 19" descr="student_report_pentagon.jpg"/>
+          <p:cNvPicPr>
+            <a:picLocks noChangeAspect="1"/>
+          </p:cNvPicPr>
+          <p:nvPr/>
+        </p:nvPicPr>
+        <p:blipFill>
+          <a:blip r:embed="rId2"/>
+          <a:stretch>
+            <a:fillRect/>
+          </a:stretch>
+        </p:blipFill>
+        <p:spPr>
+          <a:xfrm>
+            <a:off x="6355080" y="2400300"/>
+            <a:ext cx="5486400" cy="3429000"/>
+          </a:xfrm>
+          <a:prstGeom prst="rect">
+            <a:avLst/>
+          </a:prstGeom>
+        </p:spPr>
+      </p:pic>
+    </p:spTree>
+  </p:cSld>
+  <p:clrMapOvr>
+    <a:masterClrMapping/>
+  </p:clrMapOvr>
+</p:sld>
+</file>
+
+<file path=ppt/slides/slide42.xml><?xml version="1.0" encoding="utf-8"?>
+<p:sld xmlns:a="http://schemas.openxmlformats.org/drawingml/2006/main" xmlns:p="http://schemas.openxmlformats.org/presentationml/2006/main" xmlns:r="http://schemas.openxmlformats.org/officeDocument/2006/relationships">
+  <p:cSld>
+    <p:bg>
+      <p:bgPr>
+        <a:solidFill>
+          <a:srgbClr val="FFFFFF"/>
+        </a:solidFill>
+        <a:effectLst/>
+      </p:bgPr>
+    </p:bg>
+    <p:spTree>
+      <p:nvGrpSpPr>
+        <p:cNvPr id="1" name=""/>
+        <p:cNvGrpSpPr/>
+        <p:nvPr/>
+      </p:nvGrpSpPr>
+      <p:grpSpPr/>
+      <p:sp>
+        <p:nvSpPr>
+          <p:cNvPr id="2" name="Rectangle 1"/>
+          <p:cNvSpPr/>
+          <p:nvPr/>
+        </p:nvSpPr>
+        <p:spPr>
+          <a:xfrm>
+            <a:off x="0" y="0"/>
+            <a:ext cx="12191695" cy="566928"/>
+          </a:xfrm>
+          <a:prstGeom prst="rect">
+            <a:avLst/>
+          </a:prstGeom>
+          <a:solidFill>
+            <a:srgbClr val="EA580C"/>
+          </a:solidFill>
+          <a:ln>
+            <a:noFill/>
+          </a:ln>
+          <a:effectLst/>
+        </p:spPr>
+        <p:style>
+          <a:lnRef idx="1">
+            <a:schemeClr val="accent1"/>
+          </a:lnRef>
+          <a:fillRef idx="3">
+            <a:schemeClr val="accent1"/>
+          </a:fillRef>
+          <a:effectRef idx="2">
+            <a:schemeClr val="accent1"/>
+          </a:effectRef>
+          <a:fontRef idx="minor">
+            <a:schemeClr val="lt1"/>
+          </a:fontRef>
+        </p:style>
+        <p:txBody>
+          <a:bodyPr rtlCol="0" anchor="ctr"/>
+          <a:lstStyle/>
+          <a:p>
+            <a:pPr algn="ctr"/>
+          </a:p>
+        </p:txBody>
+      </p:sp>
+      <p:sp>
+        <p:nvSpPr>
+          <p:cNvPr id="3" name="Rectangle 2"/>
+          <p:cNvSpPr/>
+          <p:nvPr/>
+        </p:nvSpPr>
+        <p:spPr>
+          <a:xfrm>
+            <a:off x="0" y="566928"/>
+            <a:ext cx="12191695" cy="54864"/>
+          </a:xfrm>
+          <a:prstGeom prst="rect">
+            <a:avLst/>
+          </a:prstGeom>
+          <a:solidFill>
+            <a:srgbClr val="FFB020"/>
+          </a:solidFill>
+          <a:ln>
+            <a:noFill/>
+          </a:ln>
+          <a:effectLst/>
+        </p:spPr>
+        <p:style>
+          <a:lnRef idx="1">
+            <a:schemeClr val="accent1"/>
+          </a:lnRef>
+          <a:fillRef idx="3">
+            <a:schemeClr val="accent1"/>
+          </a:fillRef>
+          <a:effectRef idx="2">
+            <a:schemeClr val="accent1"/>
+          </a:effectRef>
+          <a:fontRef idx="minor">
+            <a:schemeClr val="lt1"/>
+          </a:fontRef>
+        </p:style>
+        <p:txBody>
+          <a:bodyPr rtlCol="0" anchor="ctr"/>
+          <a:lstStyle/>
+          <a:p>
+            <a:pPr algn="ctr"/>
+          </a:p>
+        </p:txBody>
+      </p:sp>
+      <p:sp>
+        <p:nvSpPr>
+          <p:cNvPr id="4" name="TextBox 3"/>
+          <p:cNvSpPr txBox="1"/>
+          <p:nvPr/>
+        </p:nvSpPr>
+        <p:spPr>
+          <a:xfrm>
+            <a:off x="365760" y="27432"/>
+            <a:ext cx="7315200" cy="502920"/>
+          </a:xfrm>
+          <a:prstGeom prst="rect">
+            <a:avLst/>
+          </a:prstGeom>
+          <a:noFill/>
+        </p:spPr>
+        <p:txBody>
+          <a:bodyPr wrap="square" anchor="ctr">
+            <a:spAutoFit/>
+          </a:bodyPr>
+          <a:lstStyle/>
+          <a:p>
+            <a:pPr algn="l">
+              <a:lnSpc>
+                <a:spcPct val="100000"/>
+              </a:lnSpc>
+            </a:pPr>
+            <a:r>
+              <a:rPr sz="1500" b="1">
+                <a:solidFill>
+                  <a:srgbClr val="FFFFFF"/>
+                </a:solidFill>
+                <a:latin typeface="Malgun Gothic"/>
+              </a:rPr>
+              <a:t>👩‍🏫 망고아이 교사용 사용설명서</a:t>
+            </a:r>
+          </a:p>
+        </p:txBody>
+      </p:sp>
+      <p:sp>
+        <p:nvSpPr>
+          <p:cNvPr id="5" name="TextBox 4"/>
+          <p:cNvSpPr txBox="1"/>
+          <p:nvPr/>
+        </p:nvSpPr>
+        <p:spPr>
+          <a:xfrm>
+            <a:off x="8168335" y="27432"/>
+            <a:ext cx="3657600" cy="502920"/>
+          </a:xfrm>
+          <a:prstGeom prst="rect">
+            <a:avLst/>
+          </a:prstGeom>
+          <a:noFill/>
+        </p:spPr>
+        <p:txBody>
+          <a:bodyPr wrap="square" anchor="ctr">
+            <a:spAutoFit/>
+          </a:bodyPr>
+          <a:lstStyle/>
+          <a:p>
+            <a:pPr algn="r">
+              <a:lnSpc>
+                <a:spcPct val="100000"/>
+              </a:lnSpc>
+            </a:pPr>
+            <a:r>
+              <a:rPr sz="1300" b="1">
+                <a:solidFill>
+                  <a:srgbClr val="F1F5F9"/>
+                </a:solidFill>
+                <a:latin typeface="Malgun Gothic"/>
+              </a:rPr>
+              <a:t>기능 요약 · 데이터</a:t>
+            </a:r>
+          </a:p>
+        </p:txBody>
+      </p:sp>
+      <p:sp>
+        <p:nvSpPr>
+          <p:cNvPr id="6" name="Rounded Rectangle 5"/>
+          <p:cNvSpPr/>
+          <p:nvPr/>
+        </p:nvSpPr>
+        <p:spPr>
+          <a:xfrm>
             <a:off x="365760" y="841248"/>
             <a:ext cx="658368" cy="512064"/>
           </a:xfrm>
+          <a:prstGeom prst="roundRect">
+            <a:avLst/>
+          </a:prstGeom>
+          <a:solidFill>
+            <a:srgbClr val="EA580C"/>
+          </a:solidFill>
+          <a:ln>
+            <a:noFill/>
+          </a:ln>
+          <a:effectLst/>
+        </p:spPr>
+        <p:style>
+          <a:lnRef idx="1">
+            <a:schemeClr val="accent1"/>
+          </a:lnRef>
+          <a:fillRef idx="3">
+            <a:schemeClr val="accent1"/>
+          </a:fillRef>
+          <a:effectRef idx="2">
+            <a:schemeClr val="accent1"/>
+          </a:effectRef>
+          <a:fontRef idx="minor">
+            <a:schemeClr val="lt1"/>
+          </a:fontRef>
+        </p:style>
+        <p:txBody>
+          <a:bodyPr rtlCol="0" anchor="ctr"/>
+          <a:lstStyle/>
+          <a:p>
+            <a:pPr algn="ctr"/>
+          </a:p>
+        </p:txBody>
+      </p:sp>
+      <p:sp>
+        <p:nvSpPr>
+          <p:cNvPr id="7" name="TextBox 6"/>
+          <p:cNvSpPr txBox="1"/>
+          <p:nvPr/>
+        </p:nvSpPr>
+        <p:spPr>
+          <a:xfrm>
+            <a:off x="365760" y="841248"/>
+            <a:ext cx="658368" cy="512064"/>
+          </a:xfrm>
           <a:prstGeom prst="rect">
             <a:avLst/>
           </a:prstGeom>
@@ -42798,7 +43889,7 @@
                 </a:solidFill>
                 <a:latin typeface="Malgun Gothic"/>
               </a:rPr>
-              <a:t>37</a:t>
+              <a:t>38</a:t>
             </a:r>
           </a:p>
         </p:txBody>
@@ -43818,7 +44909,7 @@
 </p:sld>
 </file>
 
-<file path=ppt/slides/slide42.xml><?xml version="1.0" encoding="utf-8"?>
+<file path=ppt/slides/slide43.xml><?xml version="1.0" encoding="utf-8"?>
 <p:sld xmlns:a="http://schemas.openxmlformats.org/drawingml/2006/main" xmlns:p="http://schemas.openxmlformats.org/presentationml/2006/main" xmlns:r="http://schemas.openxmlformats.org/officeDocument/2006/relationships">
   <p:cSld>
     <p:bg>
@@ -44080,7 +45171,7 @@
                 </a:solidFill>
                 <a:latin typeface="Malgun Gothic"/>
               </a:rPr>
-              <a:t>38</a:t>
+              <a:t>39</a:t>
             </a:r>
           </a:p>
         </p:txBody>
@@ -44246,7 +45337,7 @@
 </p:sld>
 </file>
 
-<file path=ppt/slides/slide43.xml><?xml version="1.0" encoding="utf-8"?>
+<file path=ppt/slides/slide44.xml><?xml version="1.0" encoding="utf-8"?>
 <p:sld xmlns:a="http://schemas.openxmlformats.org/drawingml/2006/main" xmlns:p="http://schemas.openxmlformats.org/presentationml/2006/main" xmlns:r="http://schemas.openxmlformats.org/officeDocument/2006/relationships">
   <p:cSld>
     <p:bg>
@@ -44508,7 +45599,7 @@
                 </a:solidFill>
                 <a:latin typeface="Malgun Gothic"/>
               </a:rPr>
-              <a:t>39</a:t>
+              <a:t>40</a:t>
             </a:r>
           </a:p>
         </p:txBody>
@@ -45304,7 +46395,7 @@
 </p:sld>
 </file>
 
-<file path=ppt/slides/slide44.xml><?xml version="1.0" encoding="utf-8"?>
+<file path=ppt/slides/slide45.xml><?xml version="1.0" encoding="utf-8"?>
 <p:sld xmlns:a="http://schemas.openxmlformats.org/drawingml/2006/main" xmlns:p="http://schemas.openxmlformats.org/presentationml/2006/main" xmlns:r="http://schemas.openxmlformats.org/officeDocument/2006/relationships">
   <p:cSld>
     <p:bg>
@@ -45566,7 +46657,7 @@
                 </a:solidFill>
                 <a:latin typeface="Malgun Gothic"/>
               </a:rPr>
-              <a:t>40</a:t>
+              <a:t>41</a:t>
             </a:r>
           </a:p>
         </p:txBody>
@@ -46322,7 +47413,7 @@
 </p:sld>
 </file>
 
-<file path=ppt/slides/slide45.xml><?xml version="1.0" encoding="utf-8"?>
+<file path=ppt/slides/slide46.xml><?xml version="1.0" encoding="utf-8"?>
 <p:sld xmlns:a="http://schemas.openxmlformats.org/drawingml/2006/main" xmlns:p="http://schemas.openxmlformats.org/presentationml/2006/main" xmlns:r="http://schemas.openxmlformats.org/officeDocument/2006/relationships">
   <p:cSld>
     <p:bg>
@@ -46584,7 +47675,7 @@
                 </a:solidFill>
                 <a:latin typeface="Malgun Gothic"/>
               </a:rPr>
-              <a:t>41</a:t>
+              <a:t>42</a:t>
             </a:r>
           </a:p>
         </p:txBody>
@@ -48195,7 +49286,7 @@
 </p:sld>
 </file>
 
-<file path=ppt/slides/slide46.xml><?xml version="1.0" encoding="utf-8"?>
+<file path=ppt/slides/slide47.xml><?xml version="1.0" encoding="utf-8"?>
 <p:sld xmlns:a="http://schemas.openxmlformats.org/drawingml/2006/main" xmlns:p="http://schemas.openxmlformats.org/presentationml/2006/main" xmlns:r="http://schemas.openxmlformats.org/officeDocument/2006/relationships">
   <p:cSld>
     <p:bg>
